--- a/docs/09-project-presentation.pptx
+++ b/docs/09-project-presentation.pptx
@@ -6301,7 +6301,7 @@
                 </a:solidFill>
                 <a:latin typeface="Aptos"/>
               </a:rPr>
-              <a:t>Счётчик и журнал получают новое значение.</a:t>
+              <a:t>Счётчик обновляется сразу, журнал пишется следом.</a:t>
             </a:r>
           </a:p>
         </p:txBody>
@@ -8132,7 +8132,7 @@
                 </a:solidFill>
                 <a:latin typeface="Aptos"/>
               </a:rPr>
-              <a:t>Усилить авторизацию и защиту от ботов</a:t>
+              <a:t>Сделать журнал устойчивым к падению процесса</a:t>
             </a:r>
           </a:p>
         </p:txBody>
